--- a/vector-legal-12-arctic-frost.pptx
+++ b/vector-legal-12-arctic-frost.pptx
@@ -3450,7 +3450,7 @@
                 </a:solidFill>
                 <a:latin typeface="Inter Display"/>
               </a:rPr>
-              <a:t>167</a:t>
+              <a:t>168</a:t>
             </a:r>
           </a:p>
         </p:txBody>
@@ -3719,7 +3719,7 @@
                 </a:solidFill>
                 <a:latin typeface="Inter"/>
               </a:rPr>
-              <a:t>Адаптация из anthropics/claude-for-legal · Apache-2.0</a:t>
+              <a:t>Адаптация anthropics/claude-for-legal (Apache-2.0) · код — MIT</a:t>
             </a:r>
           </a:p>
         </p:txBody>
@@ -5012,8 +5012,8 @@
         </p:nvSpPr>
         <p:spPr>
           <a:xfrm>
-            <a:off x="8778240" y="6528816"/>
-            <a:ext cx="2834640" cy="228600"/>
+            <a:off x="7498079" y="6528816"/>
+            <a:ext cx="4114800" cy="228600"/>
           </a:xfrm>
           <a:prstGeom prst="rect">
             <a:avLst/>
@@ -5928,8 +5928,8 @@
         </p:nvSpPr>
         <p:spPr>
           <a:xfrm>
-            <a:off x="8778240" y="6528816"/>
-            <a:ext cx="2834640" cy="228600"/>
+            <a:off x="7498079" y="6528816"/>
+            <a:ext cx="4114800" cy="228600"/>
           </a:xfrm>
           <a:prstGeom prst="rect">
             <a:avLst/>
@@ -6126,7 +6126,7 @@
                 </a:solidFill>
                 <a:latin typeface="Inter"/>
               </a:rPr>
-              <a:t>12 плагинов · 167 навыков · адаптация claude-for-legal под право РФ</a:t>
+              <a:t>12 плагинов · 168 навыков · адаптация claude-for-legal под право РФ</a:t>
             </a:r>
           </a:p>
         </p:txBody>
@@ -6240,7 +6240,7 @@
                 </a:solidFill>
                 <a:latin typeface="Inter"/>
               </a:rPr>
-              <a:t>Apache-2.0 · структурная база: anthropics/claude-for-legal (Anthropic)</a:t>
+              <a:t>MIT · структурная база: anthropics/claude-for-legal (Anthropic, Apache-2.0)</a:t>
             </a:r>
           </a:p>
         </p:txBody>
@@ -7471,7 +7471,7 @@
                 </a:solidFill>
                 <a:latin typeface="Inter"/>
               </a:rPr>
-              <a:t>Адаптация (Osmosy, Apache-2.0) — русское право + Hermes Agent + расширения:</a:t>
+              <a:t>Адаптация (Osmosy, MIT) — русское право + Hermes Agent + расширения:</a:t>
             </a:r>
           </a:p>
         </p:txBody>
@@ -7554,8 +7554,8 @@
         </p:nvSpPr>
         <p:spPr>
           <a:xfrm>
-            <a:off x="8778240" y="6528816"/>
-            <a:ext cx="2834640" cy="228600"/>
+            <a:off x="7498079" y="6528816"/>
+            <a:ext cx="4114800" cy="228600"/>
           </a:xfrm>
           <a:prstGeom prst="rect">
             <a:avLst/>
@@ -9032,8 +9032,8 @@
         </p:nvSpPr>
         <p:spPr>
           <a:xfrm>
-            <a:off x="8778240" y="6528816"/>
-            <a:ext cx="2834640" cy="228600"/>
+            <a:off x="7498079" y="6528816"/>
+            <a:ext cx="4114800" cy="228600"/>
           </a:xfrm>
           <a:prstGeom prst="rect">
             <a:avLst/>
@@ -10240,8 +10240,8 @@
         </p:nvSpPr>
         <p:spPr>
           <a:xfrm>
-            <a:off x="8778240" y="6528816"/>
-            <a:ext cx="2834640" cy="228600"/>
+            <a:off x="7498079" y="6528816"/>
+            <a:ext cx="4114800" cy="228600"/>
           </a:xfrm>
           <a:prstGeom prst="rect">
             <a:avLst/>
@@ -11527,8 +11527,8 @@
         </p:nvSpPr>
         <p:spPr>
           <a:xfrm>
-            <a:off x="8778240" y="6528816"/>
-            <a:ext cx="2834640" cy="228600"/>
+            <a:off x="7498079" y="6528816"/>
+            <a:ext cx="4114800" cy="228600"/>
           </a:xfrm>
           <a:prstGeom prst="rect">
             <a:avLst/>
@@ -12565,8 +12565,8 @@
         </p:nvSpPr>
         <p:spPr>
           <a:xfrm>
-            <a:off x="8778240" y="6528816"/>
-            <a:ext cx="2834640" cy="228600"/>
+            <a:off x="7498079" y="6528816"/>
+            <a:ext cx="4114800" cy="228600"/>
           </a:xfrm>
           <a:prstGeom prst="rect">
             <a:avLst/>
@@ -13913,8 +13913,8 @@
         </p:nvSpPr>
         <p:spPr>
           <a:xfrm>
-            <a:off x="8778240" y="6528816"/>
-            <a:ext cx="2834640" cy="228600"/>
+            <a:off x="7498079" y="6528816"/>
+            <a:ext cx="4114800" cy="228600"/>
           </a:xfrm>
           <a:prstGeom prst="rect">
             <a:avLst/>
@@ -15012,7 +15012,7 @@
                 </a:solidFill>
                 <a:latin typeface="Inter"/>
               </a:rPr>
-              <a:t>Без MCP все цитаты — [модель знания — проверь]</a:t>
+              <a:t>Без MCP все цитаты — [model knowledge — verify]</a:t>
             </a:r>
           </a:p>
         </p:txBody>
@@ -15095,8 +15095,8 @@
         </p:nvSpPr>
         <p:spPr>
           <a:xfrm>
-            <a:off x="8778240" y="6528816"/>
-            <a:ext cx="2834640" cy="228600"/>
+            <a:off x="7498079" y="6528816"/>
+            <a:ext cx="4114800" cy="228600"/>
           </a:xfrm>
           <a:prstGeom prst="rect">
             <a:avLst/>
@@ -16364,8 +16364,8 @@
         </p:nvSpPr>
         <p:spPr>
           <a:xfrm>
-            <a:off x="8778240" y="6528816"/>
-            <a:ext cx="2834640" cy="228600"/>
+            <a:off x="7498079" y="6528816"/>
+            <a:ext cx="4114800" cy="228600"/>
           </a:xfrm>
           <a:prstGeom prst="rect">
             <a:avLst/>

--- a/vector-legal-12-arctic-frost.pptx
+++ b/vector-legal-12-arctic-frost.pptx
@@ -3715,7 +3715,7 @@
             <a:r>
               <a:rPr sz="1050" b="0" i="0">
                 <a:solidFill>
-                  <a:srgbClr val="64798A"/>
+                  <a:srgbClr val="5F7283"/>
                 </a:solidFill>
                 <a:latin typeface="Inter"/>
               </a:rPr>

--- a/vector-legal-12-arctic-frost.pptx
+++ b/vector-legal-12-arctic-frost.pptx
@@ -3750,7 +3750,7 @@
             <a:r>
               <a:rPr sz="950" b="0" i="0">
                 <a:solidFill>
-                  <a:srgbClr val="64798A"/>
+                  <a:srgbClr val="5F7283"/>
                 </a:solidFill>
                 <a:latin typeface="JetBrains Mono"/>
               </a:rPr>
@@ -4995,7 +4995,7 @@
             <a:r>
               <a:rPr sz="950" b="0" i="0">
                 <a:solidFill>
-                  <a:srgbClr val="64798A"/>
+                  <a:srgbClr val="5F7283"/>
                 </a:solidFill>
                 <a:latin typeface="JetBrains Mono"/>
               </a:rPr>
@@ -5030,7 +5030,7 @@
             <a:r>
               <a:rPr sz="950" b="0" i="0">
                 <a:solidFill>
-                  <a:srgbClr val="64798A"/>
+                  <a:srgbClr val="5F7283"/>
                 </a:solidFill>
                 <a:latin typeface="JetBrains Mono"/>
               </a:rPr>
@@ -5911,7 +5911,7 @@
             <a:r>
               <a:rPr sz="950" b="0" i="0">
                 <a:solidFill>
-                  <a:srgbClr val="64798A"/>
+                  <a:srgbClr val="5F7283"/>
                 </a:solidFill>
                 <a:latin typeface="JetBrains Mono"/>
               </a:rPr>
@@ -5946,7 +5946,7 @@
             <a:r>
               <a:rPr sz="950" b="0" i="0">
                 <a:solidFill>
-                  <a:srgbClr val="64798A"/>
+                  <a:srgbClr val="5F7283"/>
                 </a:solidFill>
                 <a:latin typeface="JetBrains Mono"/>
               </a:rPr>
@@ -7537,7 +7537,7 @@
             <a:r>
               <a:rPr sz="950" b="0" i="0">
                 <a:solidFill>
-                  <a:srgbClr val="64798A"/>
+                  <a:srgbClr val="5F7283"/>
                 </a:solidFill>
                 <a:latin typeface="JetBrains Mono"/>
               </a:rPr>
@@ -7572,7 +7572,7 @@
             <a:r>
               <a:rPr sz="950" b="0" i="0">
                 <a:solidFill>
-                  <a:srgbClr val="64798A"/>
+                  <a:srgbClr val="5F7283"/>
                 </a:solidFill>
                 <a:latin typeface="JetBrains Mono"/>
               </a:rPr>
@@ -9015,7 +9015,7 @@
             <a:r>
               <a:rPr sz="950" b="0" i="0">
                 <a:solidFill>
-                  <a:srgbClr val="64798A"/>
+                  <a:srgbClr val="5F7283"/>
                 </a:solidFill>
                 <a:latin typeface="JetBrains Mono"/>
               </a:rPr>
@@ -9050,7 +9050,7 @@
             <a:r>
               <a:rPr sz="950" b="0" i="0">
                 <a:solidFill>
-                  <a:srgbClr val="64798A"/>
+                  <a:srgbClr val="5F7283"/>
                 </a:solidFill>
                 <a:latin typeface="JetBrains Mono"/>
               </a:rPr>
@@ -10223,7 +10223,7 @@
             <a:r>
               <a:rPr sz="950" b="0" i="0">
                 <a:solidFill>
-                  <a:srgbClr val="64798A"/>
+                  <a:srgbClr val="5F7283"/>
                 </a:solidFill>
                 <a:latin typeface="JetBrains Mono"/>
               </a:rPr>
@@ -10258,7 +10258,7 @@
             <a:r>
               <a:rPr sz="950" b="0" i="0">
                 <a:solidFill>
-                  <a:srgbClr val="64798A"/>
+                  <a:srgbClr val="5F7283"/>
                 </a:solidFill>
                 <a:latin typeface="JetBrains Mono"/>
               </a:rPr>
@@ -11510,7 +11510,7 @@
             <a:r>
               <a:rPr sz="950" b="0" i="0">
                 <a:solidFill>
-                  <a:srgbClr val="64798A"/>
+                  <a:srgbClr val="5F7283"/>
                 </a:solidFill>
                 <a:latin typeface="JetBrains Mono"/>
               </a:rPr>
@@ -11545,7 +11545,7 @@
             <a:r>
               <a:rPr sz="950" b="0" i="0">
                 <a:solidFill>
-                  <a:srgbClr val="64798A"/>
+                  <a:srgbClr val="5F7283"/>
                 </a:solidFill>
                 <a:latin typeface="JetBrains Mono"/>
               </a:rPr>
@@ -12548,7 +12548,7 @@
             <a:r>
               <a:rPr sz="950" b="0" i="0">
                 <a:solidFill>
-                  <a:srgbClr val="64798A"/>
+                  <a:srgbClr val="5F7283"/>
                 </a:solidFill>
                 <a:latin typeface="JetBrains Mono"/>
               </a:rPr>
@@ -12583,7 +12583,7 @@
             <a:r>
               <a:rPr sz="950" b="0" i="0">
                 <a:solidFill>
-                  <a:srgbClr val="64798A"/>
+                  <a:srgbClr val="5F7283"/>
                 </a:solidFill>
                 <a:latin typeface="JetBrains Mono"/>
               </a:rPr>
@@ -13896,7 +13896,7 @@
             <a:r>
               <a:rPr sz="950" b="0" i="0">
                 <a:solidFill>
-                  <a:srgbClr val="64798A"/>
+                  <a:srgbClr val="5F7283"/>
                 </a:solidFill>
                 <a:latin typeface="JetBrains Mono"/>
               </a:rPr>
@@ -13931,7 +13931,7 @@
             <a:r>
               <a:rPr sz="950" b="0" i="0">
                 <a:solidFill>
-                  <a:srgbClr val="64798A"/>
+                  <a:srgbClr val="5F7283"/>
                 </a:solidFill>
                 <a:latin typeface="JetBrains Mono"/>
               </a:rPr>
@@ -15078,7 +15078,7 @@
             <a:r>
               <a:rPr sz="950" b="0" i="0">
                 <a:solidFill>
-                  <a:srgbClr val="64798A"/>
+                  <a:srgbClr val="5F7283"/>
                 </a:solidFill>
                 <a:latin typeface="JetBrains Mono"/>
               </a:rPr>
@@ -15113,7 +15113,7 @@
             <a:r>
               <a:rPr sz="950" b="0" i="0">
                 <a:solidFill>
-                  <a:srgbClr val="64798A"/>
+                  <a:srgbClr val="5F7283"/>
                 </a:solidFill>
                 <a:latin typeface="JetBrains Mono"/>
               </a:rPr>
@@ -16347,7 +16347,7 @@
             <a:r>
               <a:rPr sz="950" b="0" i="0">
                 <a:solidFill>
-                  <a:srgbClr val="64798A"/>
+                  <a:srgbClr val="5F7283"/>
                 </a:solidFill>
                 <a:latin typeface="JetBrains Mono"/>
               </a:rPr>
@@ -16382,7 +16382,7 @@
             <a:r>
               <a:rPr sz="950" b="0" i="0">
                 <a:solidFill>
-                  <a:srgbClr val="64798A"/>
+                  <a:srgbClr val="5F7283"/>
                 </a:solidFill>
                 <a:latin typeface="JetBrains Mono"/>
               </a:rPr>

--- a/vector-legal-12-arctic-frost.pptx
+++ b/vector-legal-12-arctic-frost.pptx
@@ -3759,6 +3759,30 @@
           </a:p>
         </p:txBody>
       </p:sp>
+      <p:pic>
+        <p:nvPicPr>
+          <p:cNvPr id="19" name="Picture 18" descr="vector_ray_t.png"/>
+          <p:cNvPicPr>
+            <a:picLocks noChangeAspect="1"/>
+          </p:cNvPicPr>
+          <p:nvPr/>
+        </p:nvPicPr>
+        <p:blipFill>
+          <a:blip r:embed="rId2"/>
+          <a:stretch>
+            <a:fillRect/>
+          </a:stretch>
+        </p:blipFill>
+        <p:spPr>
+          <a:xfrm>
+            <a:off x="11155680" y="274320"/>
+            <a:ext cx="822960" cy="582402"/>
+          </a:xfrm>
+          <a:prstGeom prst="rect">
+            <a:avLst/>
+          </a:prstGeom>
+        </p:spPr>
+      </p:pic>
     </p:spTree>
   </p:cSld>
   <p:clrMapOvr>
